--- a/PPT/MachineLearning15-RandomForest.pptx
+++ b/PPT/MachineLearning15-RandomForest.pptx
@@ -4446,6 +4446,32 @@
               <a:rPr lang="fr-FR" dirty="0"/>
               <a:t>(f)</a:t>
             </a:r>
+          </a:p>
+          <a:p>
+            <a:r>
+              <a:rPr lang="fr-FR" dirty="0"/>
+              <a:t>Alternative récente</a:t>
+            </a:r>
+          </a:p>
+          <a:p>
+            <a:pPr lvl="1"/>
+            <a:r>
+              <a:rPr lang="fr-FR" dirty="0" err="1"/>
+              <a:t>joblib</a:t>
+            </a:r>
+            <a:endParaRPr lang="fr-FR" dirty="0"/>
+          </a:p>
+          <a:p>
+            <a:pPr lvl="1"/>
+            <a:r>
+              <a:rPr lang="fr-FR" dirty="0"/>
+              <a:t>Pour les gros modèles </a:t>
+            </a:r>
+            <a:r>
+              <a:rPr lang="fr-FR"/>
+              <a:t>(compression)</a:t>
+            </a:r>
+            <a:endParaRPr lang="fr-FR" dirty="0"/>
           </a:p>
           <a:p>
             <a:endParaRPr lang="fr-FR" dirty="0"/>
